--- a/Machine-Learning/Presentation/Präsentation1.pptx
+++ b/Machine-Learning/Presentation/Präsentation1.pptx
@@ -9,8 +9,8 @@
     <p:sldId id="257" r:id="rId3"/>
     <p:sldId id="258" r:id="rId4"/>
     <p:sldId id="260" r:id="rId5"/>
-    <p:sldId id="261" r:id="rId6"/>
-    <p:sldId id="259" r:id="rId7"/>
+    <p:sldId id="259" r:id="rId6"/>
+    <p:sldId id="261" r:id="rId7"/>
   </p:sldIdLst>
   <p:sldSz cx="12192000" cy="6858000"/>
   <p:notesSz cx="6858000" cy="9144000"/>
@@ -3381,13 +3381,8 @@
           <a:p>
             <a:r>
               <a:rPr lang="de-DE" dirty="0"/>
-              <a:t>XX</a:t>
-            </a:r>
-            <a:r>
-              <a:rPr lang="de-DE"/>
-              <a:t>, YY</a:t>
-            </a:r>
-            <a:endParaRPr lang="de-DE" dirty="0"/>
+              <a:t>XX, YY</a:t>
+            </a:r>
           </a:p>
         </p:txBody>
       </p:sp>
@@ -3910,31 +3905,36 @@
           </a:p>
         </p:txBody>
       </p:sp>
-      <p:sp>
-        <p:nvSpPr>
-          <p:cNvPr id="3" name="Inhaltsplatzhalter 2">
-            <a:extLst>
-              <a:ext uri="{FF2B5EF4-FFF2-40B4-BE49-F238E27FC236}">
-                <a16:creationId xmlns:a16="http://schemas.microsoft.com/office/drawing/2014/main" id="{DA69E384-B9F6-026B-8589-019C6AED5D2B}"/>
-              </a:ext>
-            </a:extLst>
-          </p:cNvPr>
-          <p:cNvSpPr>
-            <a:spLocks noGrp="1"/>
-          </p:cNvSpPr>
-          <p:nvPr>
-            <p:ph idx="1"/>
-          </p:nvPr>
-        </p:nvSpPr>
-        <p:spPr/>
-        <p:txBody>
-          <a:bodyPr/>
-          <a:lstStyle/>
-          <a:p>
-            <a:endParaRPr lang="de-DE" dirty="0"/>
-          </a:p>
-        </p:txBody>
-      </p:sp>
+      <p:pic>
+        <p:nvPicPr>
+          <p:cNvPr id="7" name="Grafik 6">
+            <a:extLst>
+              <a:ext uri="{FF2B5EF4-FFF2-40B4-BE49-F238E27FC236}">
+                <a16:creationId xmlns:a16="http://schemas.microsoft.com/office/drawing/2014/main" id="{1B8745C8-4A3D-37CE-17F4-ACD949A2F6CA}"/>
+              </a:ext>
+            </a:extLst>
+          </p:cNvPr>
+          <p:cNvPicPr>
+            <a:picLocks noChangeAspect="1"/>
+          </p:cNvPicPr>
+          <p:nvPr/>
+        </p:nvPicPr>
+        <p:blipFill>
+          <a:blip r:embed="rId2"/>
+          <a:stretch>
+            <a:fillRect/>
+          </a:stretch>
+        </p:blipFill>
+        <p:spPr>
+          <a:xfrm>
+            <a:off x="170935" y="1311275"/>
+            <a:ext cx="7772400" cy="5181600"/>
+          </a:xfrm>
+          <a:prstGeom prst="rect">
+            <a:avLst/>
+          </a:prstGeom>
+        </p:spPr>
+      </p:pic>
     </p:spTree>
     <p:extLst>
       <p:ext uri="{BB962C8B-B14F-4D97-AF65-F5344CB8AC3E}">
@@ -3970,7 +3970,7 @@
           <p:cNvPr id="2" name="Titel 1">
             <a:extLst>
               <a:ext uri="{FF2B5EF4-FFF2-40B4-BE49-F238E27FC236}">
-                <a16:creationId xmlns:a16="http://schemas.microsoft.com/office/drawing/2014/main" id="{3D3FB977-B0CB-B763-BF6D-1D1E2B3DF7AD}"/>
+                <a16:creationId xmlns:a16="http://schemas.microsoft.com/office/drawing/2014/main" id="{CF82E56D-03E1-070F-3D9F-13E6DBF33F22}"/>
               </a:ext>
             </a:extLst>
           </p:cNvPr>
@@ -3986,46 +3986,187 @@
           <a:bodyPr/>
           <a:lstStyle/>
           <a:p>
-            <a:endParaRPr lang="de-DE"/>
-          </a:p>
-        </p:txBody>
-      </p:sp>
-      <p:pic>
-        <p:nvPicPr>
-          <p:cNvPr id="5" name="Inhaltsplatzhalter 4">
-            <a:extLst>
-              <a:ext uri="{FF2B5EF4-FFF2-40B4-BE49-F238E27FC236}">
-                <a16:creationId xmlns:a16="http://schemas.microsoft.com/office/drawing/2014/main" id="{84917DE8-C5CB-9F0F-E57A-BB4CFC6CA6A5}"/>
-              </a:ext>
-            </a:extLst>
-          </p:cNvPr>
-          <p:cNvPicPr>
-            <a:picLocks noGrp="1" noChangeAspect="1"/>
-          </p:cNvPicPr>
+            <a:r>
+              <a:rPr lang="de-DE" dirty="0" err="1"/>
+              <a:t>Biggest</a:t>
+            </a:r>
+            <a:r>
+              <a:rPr lang="de-DE" dirty="0"/>
+              <a:t> Challenge</a:t>
+            </a:r>
+          </a:p>
+        </p:txBody>
+      </p:sp>
+      <p:sp>
+        <p:nvSpPr>
+          <p:cNvPr id="3" name="Inhaltsplatzhalter 2">
+            <a:extLst>
+              <a:ext uri="{FF2B5EF4-FFF2-40B4-BE49-F238E27FC236}">
+                <a16:creationId xmlns:a16="http://schemas.microsoft.com/office/drawing/2014/main" id="{05F61933-6A4C-E52C-7C2A-56247FFA274B}"/>
+              </a:ext>
+            </a:extLst>
+          </p:cNvPr>
+          <p:cNvSpPr>
+            <a:spLocks noGrp="1"/>
+          </p:cNvSpPr>
           <p:nvPr>
             <p:ph idx="1"/>
           </p:nvPr>
-        </p:nvPicPr>
-        <p:blipFill>
-          <a:blip r:embed="rId2"/>
-          <a:stretch>
-            <a:fillRect/>
-          </a:stretch>
-        </p:blipFill>
-        <p:spPr>
-          <a:xfrm>
-            <a:off x="-246322" y="1810064"/>
-            <a:ext cx="12888631" cy="2921423"/>
-          </a:xfrm>
-          <a:prstGeom prst="rect">
-            <a:avLst/>
-          </a:prstGeom>
-        </p:spPr>
-      </p:pic>
+        </p:nvSpPr>
+        <p:spPr/>
+        <p:txBody>
+          <a:bodyPr/>
+          <a:lstStyle/>
+          <a:p>
+            <a:r>
+              <a:rPr lang="de-DE" dirty="0"/>
+              <a:t>Idea </a:t>
+            </a:r>
+            <a:r>
+              <a:rPr lang="de-DE" dirty="0" err="1"/>
+              <a:t>of</a:t>
+            </a:r>
+            <a:r>
+              <a:rPr lang="de-DE" dirty="0"/>
+              <a:t> </a:t>
+            </a:r>
+            <a:r>
+              <a:rPr lang="de-DE" dirty="0" err="1"/>
+              <a:t>privacy</a:t>
+            </a:r>
+            <a:r>
+              <a:rPr lang="de-DE" dirty="0"/>
+              <a:t> </a:t>
+            </a:r>
+            <a:r>
+              <a:rPr lang="de-DE" dirty="0" err="1"/>
+              <a:t>first</a:t>
+            </a:r>
+            <a:r>
+              <a:rPr lang="de-DE" dirty="0"/>
+              <a:t>: </a:t>
+            </a:r>
+            <a:r>
+              <a:rPr lang="de-DE" dirty="0" err="1"/>
+              <a:t>we</a:t>
+            </a:r>
+            <a:r>
+              <a:rPr lang="de-DE" dirty="0"/>
+              <a:t> </a:t>
+            </a:r>
+            <a:r>
+              <a:rPr lang="de-DE" dirty="0" err="1"/>
+              <a:t>cannot</a:t>
+            </a:r>
+            <a:r>
+              <a:rPr lang="de-DE" dirty="0"/>
+              <a:t> </a:t>
+            </a:r>
+            <a:r>
+              <a:rPr lang="de-DE" dirty="0" err="1"/>
+              <a:t>work</a:t>
+            </a:r>
+            <a:r>
+              <a:rPr lang="de-DE" dirty="0"/>
+              <a:t> </a:t>
+            </a:r>
+            <a:r>
+              <a:rPr lang="de-DE" dirty="0" err="1"/>
+              <a:t>with</a:t>
+            </a:r>
+            <a:r>
+              <a:rPr lang="de-DE" dirty="0"/>
+              <a:t> real </a:t>
+            </a:r>
+            <a:r>
+              <a:rPr lang="de-DE" dirty="0" err="1"/>
+              <a:t>data</a:t>
+            </a:r>
+            <a:r>
+              <a:rPr lang="de-DE" dirty="0"/>
+              <a:t> </a:t>
+            </a:r>
+            <a:r>
+              <a:rPr lang="de-DE" dirty="0" err="1"/>
+              <a:t>while</a:t>
+            </a:r>
+            <a:r>
+              <a:rPr lang="de-DE" dirty="0"/>
+              <a:t> </a:t>
+            </a:r>
+            <a:r>
+              <a:rPr lang="de-DE" dirty="0" err="1"/>
+              <a:t>using</a:t>
+            </a:r>
+            <a:r>
+              <a:rPr lang="de-DE" dirty="0"/>
+              <a:t> Co-</a:t>
+            </a:r>
+            <a:r>
+              <a:rPr lang="de-DE" dirty="0" err="1"/>
+              <a:t>Pilots</a:t>
+            </a:r>
+            <a:endParaRPr lang="de-DE" dirty="0"/>
+          </a:p>
+          <a:p>
+            <a:r>
+              <a:rPr lang="de-DE" dirty="0" err="1"/>
+              <a:t>Synthesized</a:t>
+            </a:r>
+            <a:r>
+              <a:rPr lang="de-DE" dirty="0"/>
+              <a:t> </a:t>
+            </a:r>
+            <a:r>
+              <a:rPr lang="de-DE" dirty="0" err="1"/>
+              <a:t>data</a:t>
+            </a:r>
+            <a:r>
+              <a:rPr lang="de-DE" dirty="0"/>
+              <a:t> </a:t>
+            </a:r>
+            <a:r>
+              <a:rPr lang="de-DE" dirty="0" err="1"/>
+              <a:t>is</a:t>
+            </a:r>
+            <a:r>
+              <a:rPr lang="de-DE" dirty="0"/>
+              <a:t> not </a:t>
+            </a:r>
+            <a:r>
+              <a:rPr lang="de-DE" dirty="0" err="1"/>
+              <a:t>as</a:t>
+            </a:r>
+            <a:r>
+              <a:rPr lang="de-DE" dirty="0"/>
+              <a:t> </a:t>
+            </a:r>
+            <a:r>
+              <a:rPr lang="de-DE" dirty="0" err="1"/>
+              <a:t>authentic</a:t>
+            </a:r>
+            <a:endParaRPr lang="de-DE" dirty="0"/>
+          </a:p>
+          <a:p>
+            <a:endParaRPr lang="de-DE" dirty="0"/>
+          </a:p>
+          <a:p>
+            <a:r>
+              <a:rPr lang="de-DE" dirty="0"/>
+              <a:t>…. </a:t>
+            </a:r>
+            <a:r>
+              <a:rPr lang="de-DE"/>
+              <a:t>Problems????</a:t>
+            </a:r>
+            <a:endParaRPr lang="de-DE" dirty="0"/>
+          </a:p>
+        </p:txBody>
+      </p:sp>
     </p:spTree>
     <p:extLst>
       <p:ext uri="{BB962C8B-B14F-4D97-AF65-F5344CB8AC3E}">
-        <p14:creationId xmlns:p14="http://schemas.microsoft.com/office/powerpoint/2010/main" val="385988624"/>
+        <p14:creationId xmlns:p14="http://schemas.microsoft.com/office/powerpoint/2010/main" val="3708444737"/>
       </p:ext>
     </p:extLst>
   </p:cSld>
@@ -4057,7 +4198,7 @@
           <p:cNvPr id="2" name="Titel 1">
             <a:extLst>
               <a:ext uri="{FF2B5EF4-FFF2-40B4-BE49-F238E27FC236}">
-                <a16:creationId xmlns:a16="http://schemas.microsoft.com/office/drawing/2014/main" id="{CF82E56D-03E1-070F-3D9F-13E6DBF33F22}"/>
+                <a16:creationId xmlns:a16="http://schemas.microsoft.com/office/drawing/2014/main" id="{3D3FB977-B0CB-B763-BF6D-1D1E2B3DF7AD}"/>
               </a:ext>
             </a:extLst>
           </p:cNvPr>
@@ -4073,141 +4214,46 @@
           <a:bodyPr/>
           <a:lstStyle/>
           <a:p>
-            <a:r>
-              <a:rPr lang="de-DE" dirty="0" err="1"/>
-              <a:t>Biggest</a:t>
-            </a:r>
-            <a:r>
-              <a:rPr lang="de-DE" dirty="0"/>
-              <a:t> Challenge</a:t>
-            </a:r>
-          </a:p>
-        </p:txBody>
-      </p:sp>
-      <p:sp>
-        <p:nvSpPr>
-          <p:cNvPr id="3" name="Inhaltsplatzhalter 2">
-            <a:extLst>
-              <a:ext uri="{FF2B5EF4-FFF2-40B4-BE49-F238E27FC236}">
-                <a16:creationId xmlns:a16="http://schemas.microsoft.com/office/drawing/2014/main" id="{05F61933-6A4C-E52C-7C2A-56247FFA274B}"/>
-              </a:ext>
-            </a:extLst>
-          </p:cNvPr>
-          <p:cNvSpPr>
-            <a:spLocks noGrp="1"/>
-          </p:cNvSpPr>
+            <a:endParaRPr lang="de-DE"/>
+          </a:p>
+        </p:txBody>
+      </p:sp>
+      <p:pic>
+        <p:nvPicPr>
+          <p:cNvPr id="5" name="Inhaltsplatzhalter 4">
+            <a:extLst>
+              <a:ext uri="{FF2B5EF4-FFF2-40B4-BE49-F238E27FC236}">
+                <a16:creationId xmlns:a16="http://schemas.microsoft.com/office/drawing/2014/main" id="{84917DE8-C5CB-9F0F-E57A-BB4CFC6CA6A5}"/>
+              </a:ext>
+            </a:extLst>
+          </p:cNvPr>
+          <p:cNvPicPr>
+            <a:picLocks noGrp="1" noChangeAspect="1"/>
+          </p:cNvPicPr>
           <p:nvPr>
             <p:ph idx="1"/>
           </p:nvPr>
-        </p:nvSpPr>
-        <p:spPr/>
-        <p:txBody>
-          <a:bodyPr/>
-          <a:lstStyle/>
-          <a:p>
-            <a:r>
-              <a:rPr lang="de-DE" dirty="0"/>
-              <a:t>Idea </a:t>
-            </a:r>
-            <a:r>
-              <a:rPr lang="de-DE" dirty="0" err="1"/>
-              <a:t>of</a:t>
-            </a:r>
-            <a:r>
-              <a:rPr lang="de-DE" dirty="0"/>
-              <a:t> </a:t>
-            </a:r>
-            <a:r>
-              <a:rPr lang="de-DE" dirty="0" err="1"/>
-              <a:t>privacy</a:t>
-            </a:r>
-            <a:r>
-              <a:rPr lang="de-DE" dirty="0"/>
-              <a:t> </a:t>
-            </a:r>
-            <a:r>
-              <a:rPr lang="de-DE" dirty="0" err="1"/>
-              <a:t>first</a:t>
-            </a:r>
-            <a:r>
-              <a:rPr lang="de-DE" dirty="0"/>
-              <a:t>: </a:t>
-            </a:r>
-            <a:r>
-              <a:rPr lang="de-DE" dirty="0" err="1"/>
-              <a:t>we</a:t>
-            </a:r>
-            <a:r>
-              <a:rPr lang="de-DE" dirty="0"/>
-              <a:t> </a:t>
-            </a:r>
-            <a:r>
-              <a:rPr lang="de-DE" dirty="0" err="1"/>
-              <a:t>cannot</a:t>
-            </a:r>
-            <a:r>
-              <a:rPr lang="de-DE" dirty="0"/>
-              <a:t> </a:t>
-            </a:r>
-            <a:r>
-              <a:rPr lang="de-DE" dirty="0" err="1"/>
-              <a:t>work</a:t>
-            </a:r>
-            <a:r>
-              <a:rPr lang="de-DE" dirty="0"/>
-              <a:t> </a:t>
-            </a:r>
-            <a:r>
-              <a:rPr lang="de-DE" dirty="0" err="1"/>
-              <a:t>with</a:t>
-            </a:r>
-            <a:r>
-              <a:rPr lang="de-DE" dirty="0"/>
-              <a:t> real </a:t>
-            </a:r>
-            <a:r>
-              <a:rPr lang="de-DE" dirty="0" err="1"/>
-              <a:t>data</a:t>
-            </a:r>
-            <a:r>
-              <a:rPr lang="de-DE" dirty="0"/>
-              <a:t> </a:t>
-            </a:r>
-            <a:r>
-              <a:rPr lang="de-DE" dirty="0" err="1"/>
-              <a:t>while</a:t>
-            </a:r>
-            <a:r>
-              <a:rPr lang="de-DE" dirty="0"/>
-              <a:t> </a:t>
-            </a:r>
-            <a:r>
-              <a:rPr lang="de-DE" dirty="0" err="1"/>
-              <a:t>using</a:t>
-            </a:r>
-            <a:r>
-              <a:rPr lang="de-DE" dirty="0"/>
-              <a:t> Co-</a:t>
-            </a:r>
-            <a:r>
-              <a:rPr lang="de-DE" dirty="0" err="1"/>
-              <a:t>Pilots</a:t>
-            </a:r>
-            <a:endParaRPr lang="de-DE" dirty="0"/>
-          </a:p>
-          <a:p>
-            <a:r>
-              <a:rPr lang="de-DE" dirty="0" err="1"/>
-              <a:t>synthesiz</a:t>
-            </a:r>
-            <a:endParaRPr lang="de-DE" dirty="0"/>
-          </a:p>
-        </p:txBody>
-      </p:sp>
+        </p:nvPicPr>
+        <p:blipFill>
+          <a:blip r:embed="rId2"/>
+          <a:stretch>
+            <a:fillRect/>
+          </a:stretch>
+        </p:blipFill>
+        <p:spPr>
+          <a:xfrm>
+            <a:off x="-246322" y="1810064"/>
+            <a:ext cx="12888631" cy="2921423"/>
+          </a:xfrm>
+          <a:prstGeom prst="rect">
+            <a:avLst/>
+          </a:prstGeom>
+        </p:spPr>
+      </p:pic>
     </p:spTree>
     <p:extLst>
       <p:ext uri="{BB962C8B-B14F-4D97-AF65-F5344CB8AC3E}">
-        <p14:creationId xmlns:p14="http://schemas.microsoft.com/office/powerpoint/2010/main" val="3708444737"/>
+        <p14:creationId xmlns:p14="http://schemas.microsoft.com/office/powerpoint/2010/main" val="385988624"/>
       </p:ext>
     </p:extLst>
   </p:cSld>
